--- a/builder/assets/reference-pages/industry-value-chain.pptx
+++ b/builder/assets/reference-pages/industry-value-chain.pptx
@@ -1097,7 +1097,7 @@
                   <a:srgbClr val="15375F"/>
                 </a:solidFill>
               </a:rPr>
-              <a:t>价值向上游数据与下游运营迁移，我方应从交付向运营延伸</a:t>
+              <a:t>Value migrates to upstream data and downstream operations, and we should extend from delivery to operations</a:t>
             </a:r>
           </a:p>
         </p:txBody>
@@ -1522,7 +1522,7 @@
                   <a:srgbClr val="FFFFFF"/>
                 </a:solidFill>
               </a:rPr>
-              <a:t>数据与资源</a:t>
+              <a:t>Data and resources</a:t>
             </a:r>
           </a:p>
           <a:p xmlns:a="http://schemas.openxmlformats.org/drawingml/2006/main">
@@ -1539,7 +1539,7 @@
                   <a:srgbClr val="FFFFFF"/>
                 </a:solidFill>
               </a:rPr>
-              <a:t>利润率 31%｜规模 86 亿</a:t>
+              <a:t>profit margin 31%｜scale 86 billion</a:t>
             </a:r>
           </a:p>
           <a:p xmlns:a="http://schemas.openxmlformats.org/drawingml/2006/main">
@@ -1610,7 +1610,7 @@
                   <a:srgbClr val="15375F"/>
                 </a:solidFill>
               </a:rPr>
-              <a:t>高｜数据稀缺</a:t>
+              <a:t>high｜data scarcity</a:t>
             </a:r>
           </a:p>
         </p:txBody>
@@ -1697,7 +1697,7 @@
                   <a:srgbClr val="FFFFFF"/>
                 </a:solidFill>
               </a:rPr>
-              <a:t>平台工具</a:t>
+              <a:t>Platform tools</a:t>
             </a:r>
           </a:p>
           <a:p xmlns:a="http://schemas.openxmlformats.org/drawingml/2006/main">
@@ -1714,7 +1714,7 @@
                   <a:srgbClr val="FFFFFF"/>
                 </a:solidFill>
               </a:rPr>
-              <a:t>利润率 24%｜规模 132 亿</a:t>
+              <a:t>profit margin 24%｜scale 132 billion</a:t>
             </a:r>
           </a:p>
           <a:p xmlns:a="http://schemas.openxmlformats.org/drawingml/2006/main">
@@ -1785,7 +1785,7 @@
                   <a:srgbClr val="15375F"/>
                 </a:solidFill>
               </a:rPr>
-              <a:t>高｜规模效应</a:t>
+              <a:t>high｜scale effect</a:t>
             </a:r>
           </a:p>
         </p:txBody>
@@ -1872,7 +1872,7 @@
                   <a:srgbClr val="FFFFFF"/>
                 </a:solidFill>
               </a:rPr>
-              <a:t>方案设计</a:t>
+              <a:t>Scheme design</a:t>
             </a:r>
           </a:p>
           <a:p xmlns:a="http://schemas.openxmlformats.org/drawingml/2006/main">
@@ -1889,7 +1889,7 @@
                   <a:srgbClr val="FFFFFF"/>
                 </a:solidFill>
               </a:rPr>
-              <a:t>利润率 17%｜规模 74 亿</a:t>
+              <a:t>profit margin 17%｜scale 74 billion</a:t>
             </a:r>
           </a:p>
           <a:p xmlns:a="http://schemas.openxmlformats.org/drawingml/2006/main">
@@ -1960,7 +1960,7 @@
                   <a:srgbClr val="15375F"/>
                 </a:solidFill>
               </a:rPr>
-              <a:t>中｜专业能力</a:t>
+              <a:t>in｜Professional ability</a:t>
             </a:r>
           </a:p>
         </p:txBody>
@@ -2047,7 +2047,7 @@
                   <a:srgbClr val="FFFFFF"/>
                 </a:solidFill>
               </a:rPr>
-              <a:t>交付实施</a:t>
+              <a:t>Deliver implementation</a:t>
             </a:r>
           </a:p>
           <a:p xmlns:a="http://schemas.openxmlformats.org/drawingml/2006/main">
@@ -2064,7 +2064,7 @@
                   <a:srgbClr val="FFFFFF"/>
                 </a:solidFill>
               </a:rPr>
-              <a:t>利润率 12%｜规模 96 亿</a:t>
+              <a:t>profit margin 12%｜scale 96 billion</a:t>
             </a:r>
           </a:p>
           <a:p xmlns:a="http://schemas.openxmlformats.org/drawingml/2006/main">
@@ -2135,7 +2135,7 @@
                   <a:srgbClr val="15375F"/>
                 </a:solidFill>
               </a:rPr>
-              <a:t>低｜人员密集</a:t>
+              <a:t>low｜densely populated</a:t>
             </a:r>
           </a:p>
         </p:txBody>
@@ -2222,7 +2222,7 @@
                   <a:srgbClr val="FFFFFF"/>
                 </a:solidFill>
               </a:rPr>
-              <a:t>运营增值</a:t>
+              <a:t>Operational value added</a:t>
             </a:r>
           </a:p>
           <a:p xmlns:a="http://schemas.openxmlformats.org/drawingml/2006/main">
@@ -2239,7 +2239,7 @@
                   <a:srgbClr val="FFFFFF"/>
                 </a:solidFill>
               </a:rPr>
-              <a:t>利润率 29%｜规模 115 亿</a:t>
+              <a:t>profit margin 29%｜scale 115 billion</a:t>
             </a:r>
           </a:p>
           <a:p xmlns:a="http://schemas.openxmlformats.org/drawingml/2006/main">
@@ -2310,7 +2310,7 @@
                   <a:srgbClr val="15375F"/>
                 </a:solidFill>
               </a:rPr>
-              <a:t>中｜客户触点</a:t>
+              <a:t>in｜customer touch points</a:t>
             </a:r>
           </a:p>
         </p:txBody>
@@ -2360,7 +2360,7 @@
                   <a:srgbClr val="15375F"/>
                 </a:solidFill>
               </a:rPr>
-              <a:t>大厂平台</a:t>
+              <a:t>Dachang platform</a:t>
             </a:r>
           </a:p>
         </p:txBody>
@@ -2644,7 +2644,7 @@
                   <a:srgbClr val="15375F"/>
                 </a:solidFill>
               </a:rPr>
-              <a:t>垂直 SaaS</a:t>
+              <a:t>vertical SaaS</a:t>
             </a:r>
           </a:p>
         </p:txBody>
@@ -2940,7 +2940,7 @@
                   <a:srgbClr val="15375F"/>
                 </a:solidFill>
               </a:rPr>
-              <a:t>传统咨询</a:t>
+              <a:t>traditional consulting</a:t>
             </a:r>
           </a:p>
         </p:txBody>
@@ -3224,7 +3224,7 @@
                   <a:srgbClr val="15375F"/>
                 </a:solidFill>
               </a:rPr>
-              <a:t>独立顾问</a:t>
+              <a:t>independent consultant</a:t>
             </a:r>
           </a:p>
         </p:txBody>
@@ -3508,7 +3508,7 @@
                   <a:srgbClr val="E8872D"/>
                 </a:solidFill>
               </a:rPr>
-              <a:t>我方</a:t>
+              <a:t>Our side</a:t>
             </a:r>
           </a:p>
         </p:txBody>
@@ -3754,7 +3754,7 @@
                   <a:srgbClr val="E8872D"/>
                 </a:solidFill>
               </a:rPr>
-              <a:t>拟进入</a:t>
+              <a:t>intends to enter</a:t>
             </a:r>
           </a:p>
         </p:txBody>
@@ -3810,7 +3810,7 @@
                   <a:srgbClr val="15375F"/>
                 </a:solidFill>
               </a:rPr>
-              <a:t>我方定位：以咨询设计为入口，合作进入持续运营与增值服务</a:t>
+              <a:t>Our positioning: Taking consulting and design as the entrance, cooperation enters into continuous operation and value-added services</a:t>
             </a:r>
           </a:p>
         </p:txBody>
